--- a/build/session-03/session-03-slides.pptx
+++ b/build/session-03/session-03-slides.pptx
@@ -970,7 +970,7 @@
           <a:p>
             <a:r>
               <a:rPr lang="en-US" dirty="0"/>
-              <a:t>Close on the three bullets, then brief the homework concretely: a one-word verdict earns nothing, and "derived, not recalled" means we want the triangle, not the table. Flag tomorrow — today gave the grammar of functions, tomorrow gives the vocabulary: the standard families and their growth.</a:t>
+              <a:t>Close on the three bullets, then brief the problem set concretely: a one-word verdict earns nothing, and "derived, not recalled" means we want the triangle, not the table. Flag tomorrow — today gave the grammar of functions, tomorrow gives the vocabulary: the standard families and their growth.</a:t>
             </a:r>
           </a:p>
         </p:txBody>
@@ -1064,7 +1064,7 @@
           <a:p>
             <a:r>
               <a:rPr lang="en-US" dirty="0"/>
-              <a:t>Read them out. Objective 2 is the assessed one — homework is eight classification items and each needs a proof or a counterexample, not a verdict. Objectives 3 and 4 join up at the end of the day: $\arcsin$ exists only because we restrict $\sin$ until it is a bijection.</a:t>
+              <a:t>Read them out. Objective 2 is the one that matters — the problem set is eight classification items and each needs a proof or a counterexample, not a verdict. Objectives 3 and 4 join up at the end of the day: $\arcsin$ exists only because we restrict $\sin$ until it is a bijection.</a:t>
             </a:r>
           </a:p>
         </p:txBody>

--- a/build/session-03/session-03-slides.pptx
+++ b/build/session-03/session-03-slides.pptx
@@ -33,7 +33,6 @@
     <p:sldId id="278" r:id="rId25"/>
     <p:sldId id="279" r:id="rId26"/>
     <p:sldId id="280" r:id="rId27"/>
-    <p:sldId id="281" r:id="rId28"/>
   </p:sldIdLst>
   <p:sldSz cx="12192000" cy="6858000"/>
   <p:notesSz cx="6858000" cy="12192000"/>
@@ -171,53 +170,6 @@
           <a:p>
             <a:r>
               <a:rPr lang="en-US" dirty="0"/>
-              <a:t>The asymmetry is the lesson: the positive claims are universal and need an argument, the negative claims are existential and need one number. Students routinely try to disprove surjectivity by saying "it looks like nothing hits $-1$" — that is not the fourth template, and it costs marks all term. Note where the surjectivity witness $\tfrac{y+5}{3}$ came from: solve $f(x) = y$ on scrap paper, then present the answer as a construction. Say that out loud — the discovery and the write-up are different documents.</a:t>
-            </a:r>
-          </a:p>
-        </p:txBody>
-      </p:sp>
-    </p:spTree>
-  </p:cSld>
-  <p:clrMapOvr>
-    <a:masterClrMapping/>
-  </p:clrMapOvr>
-</p:notes>
-</file>
-
-<file path=ppt/notesSlides/notesSlide11.xml><?xml version="1.0" encoding="utf-8"?>
-<p:notes xmlns:a="http://schemas.openxmlformats.org/drawingml/2006/main" xmlns:r="http://schemas.openxmlformats.org/officeDocument/2006/relationships" xmlns:p="http://schemas.openxmlformats.org/presentationml/2006/main">
-  <p:cSld>
-    <p:spTree>
-      <p:nvGrpSpPr>
-        <p:cNvPr id="1" name=""/>
-        <p:cNvGrpSpPr/>
-        <p:nvPr/>
-      </p:nvGrpSpPr>
-      <p:grpSpPr>
-        <a:xfrm>
-          <a:off x="0" y="0"/>
-          <a:ext cx="0" cy="0"/>
-          <a:chOff x="0" y="0"/>
-          <a:chExt cx="0" cy="0"/>
-        </a:xfrm>
-      </p:grpSpPr>
-      <p:sp>
-        <p:nvSpPr>
-          <p:cNvPr id="2" name="Notes Placeholder 11"/>
-          <p:cNvSpPr>
-            <a:spLocks noGrp="1"/>
-          </p:cNvSpPr>
-          <p:nvPr>
-            <p:ph type="body" idx="1"/>
-          </p:nvPr>
-        </p:nvSpPr>
-        <p:spPr/>
-        <p:txBody>
-          <a:bodyPr/>
-          <a:lstStyle/>
-          <a:p>
-            <a:r>
-              <a:rPr lang="en-US" dirty="0"/>
               <a:t>Answers: (1) injective, not surjective — $2n+1$ is always odd so $2$ is missed. (2) bijective, inverse $\sqrt[3]{y}$. (3) neither — $f(-1) = f(1)$, while $-1$ is missed. (4) injective, not surjective — with $\mathbb{N}$ starting at $1$, nothing maps to $1$. (5) surjective via $(k,0)$, not injective since $f(1,1) = f(2,2)$. (6) bijective, inverse $\log_2 y$. Item 3 is the one to take to the board: it shows that one counterexample can settle injectivity, and one missed codomain value can settle surjectivity. Item 4 will start an argument about whether $0 \in \mathbb{N}$ — settle it by convention and point out the verdict changes.</a:t>
             </a:r>
           </a:p>
@@ -231,7 +183,7 @@
 </p:notes>
 </file>
 
-<file path=ppt/notesSlides/notesSlide12.xml><?xml version="1.0" encoding="utf-8"?>
+<file path=ppt/notesSlides/notesSlide11.xml><?xml version="1.0" encoding="utf-8"?>
 <p:notes xmlns:a="http://schemas.openxmlformats.org/drawingml/2006/main" xmlns:r="http://schemas.openxmlformats.org/officeDocument/2006/relationships" xmlns:p="http://schemas.openxmlformats.org/presentationml/2006/main">
   <p:cSld>
     <p:spTree>
@@ -250,7 +202,7 @@
       </p:grpSpPr>
       <p:sp>
         <p:nvSpPr>
-          <p:cNvPr id="2" name="Notes Placeholder 12"/>
+          <p:cNvPr id="2" name="Notes Placeholder 11"/>
           <p:cNvSpPr>
             <a:spLocks noGrp="1"/>
           </p:cNvSpPr>
@@ -278,7 +230,7 @@
 </p:notes>
 </file>
 
-<file path=ppt/notesSlides/notesSlide13.xml><?xml version="1.0" encoding="utf-8"?>
+<file path=ppt/notesSlides/notesSlide12.xml><?xml version="1.0" encoding="utf-8"?>
 <p:notes xmlns:a="http://schemas.openxmlformats.org/drawingml/2006/main" xmlns:r="http://schemas.openxmlformats.org/officeDocument/2006/relationships" xmlns:p="http://schemas.openxmlformats.org/presentationml/2006/main">
   <p:cSld>
     <p:spTree>
@@ -297,7 +249,7 @@
       </p:grpSpPr>
       <p:sp>
         <p:nvSpPr>
-          <p:cNvPr id="2" name="Notes Placeholder 13"/>
+          <p:cNvPr id="2" name="Notes Placeholder 12"/>
           <p:cNvSpPr>
             <a:spLocks noGrp="1"/>
           </p:cNvSpPr>
@@ -325,7 +277,7 @@
 </p:notes>
 </file>
 
-<file path=ppt/notesSlides/notesSlide14.xml><?xml version="1.0" encoding="utf-8"?>
+<file path=ppt/notesSlides/notesSlide13.xml><?xml version="1.0" encoding="utf-8"?>
 <p:notes xmlns:a="http://schemas.openxmlformats.org/drawingml/2006/main" xmlns:r="http://schemas.openxmlformats.org/officeDocument/2006/relationships" xmlns:p="http://schemas.openxmlformats.org/presentationml/2006/main">
   <p:cSld>
     <p:spTree>
@@ -344,7 +296,7 @@
       </p:grpSpPr>
       <p:sp>
         <p:nvSpPr>
-          <p:cNvPr id="2" name="Notes Placeholder 14"/>
+          <p:cNvPr id="2" name="Notes Placeholder 13"/>
           <p:cNvSpPr>
             <a:spLocks noGrp="1"/>
           </p:cNvSpPr>
@@ -372,7 +324,7 @@
 </p:notes>
 </file>
 
-<file path=ppt/notesSlides/notesSlide15.xml><?xml version="1.0" encoding="utf-8"?>
+<file path=ppt/notesSlides/notesSlide14.xml><?xml version="1.0" encoding="utf-8"?>
 <p:notes xmlns:a="http://schemas.openxmlformats.org/drawingml/2006/main" xmlns:r="http://schemas.openxmlformats.org/officeDocument/2006/relationships" xmlns:p="http://schemas.openxmlformats.org/presentationml/2006/main">
   <p:cSld>
     <p:spTree>
@@ -391,7 +343,7 @@
       </p:grpSpPr>
       <p:sp>
         <p:nvSpPr>
-          <p:cNvPr id="2" name="Notes Placeholder 15"/>
+          <p:cNvPr id="2" name="Notes Placeholder 14"/>
           <p:cNvSpPr>
             <a:spLocks noGrp="1"/>
           </p:cNvSpPr>
@@ -419,7 +371,7 @@
 </p:notes>
 </file>
 
-<file path=ppt/notesSlides/notesSlide16.xml><?xml version="1.0" encoding="utf-8"?>
+<file path=ppt/notesSlides/notesSlide15.xml><?xml version="1.0" encoding="utf-8"?>
 <p:notes xmlns:a="http://schemas.openxmlformats.org/drawingml/2006/main" xmlns:r="http://schemas.openxmlformats.org/officeDocument/2006/relationships" xmlns:p="http://schemas.openxmlformats.org/presentationml/2006/main">
   <p:cSld>
     <p:spTree>
@@ -438,7 +390,7 @@
       </p:grpSpPr>
       <p:sp>
         <p:nvSpPr>
-          <p:cNvPr id="2" name="Notes Placeholder 16"/>
+          <p:cNvPr id="2" name="Notes Placeholder 15"/>
           <p:cNvSpPr>
             <a:spLocks noGrp="1"/>
           </p:cNvSpPr>
@@ -466,7 +418,7 @@
 </p:notes>
 </file>
 
-<file path=ppt/notesSlides/notesSlide17.xml><?xml version="1.0" encoding="utf-8"?>
+<file path=ppt/notesSlides/notesSlide16.xml><?xml version="1.0" encoding="utf-8"?>
 <p:notes xmlns:a="http://schemas.openxmlformats.org/drawingml/2006/main" xmlns:r="http://schemas.openxmlformats.org/officeDocument/2006/relationships" xmlns:p="http://schemas.openxmlformats.org/presentationml/2006/main">
   <p:cSld>
     <p:spTree>
@@ -485,7 +437,7 @@
       </p:grpSpPr>
       <p:sp>
         <p:nvSpPr>
-          <p:cNvPr id="2" name="Notes Placeholder 17"/>
+          <p:cNvPr id="2" name="Notes Placeholder 16"/>
           <p:cNvSpPr>
             <a:spLocks noGrp="1"/>
           </p:cNvSpPr>
@@ -513,7 +465,7 @@
 </p:notes>
 </file>
 
-<file path=ppt/notesSlides/notesSlide18.xml><?xml version="1.0" encoding="utf-8"?>
+<file path=ppt/notesSlides/notesSlide17.xml><?xml version="1.0" encoding="utf-8"?>
 <p:notes xmlns:a="http://schemas.openxmlformats.org/drawingml/2006/main" xmlns:r="http://schemas.openxmlformats.org/officeDocument/2006/relationships" xmlns:p="http://schemas.openxmlformats.org/presentationml/2006/main">
   <p:cSld>
     <p:spTree>
@@ -532,7 +484,7 @@
       </p:grpSpPr>
       <p:sp>
         <p:nvSpPr>
-          <p:cNvPr id="2" name="Notes Placeholder 18"/>
+          <p:cNvPr id="2" name="Notes Placeholder 17"/>
           <p:cNvSpPr>
             <a:spLocks noGrp="1"/>
           </p:cNvSpPr>
@@ -560,6 +512,53 @@
 </p:notes>
 </file>
 
+<file path=ppt/notesSlides/notesSlide18.xml><?xml version="1.0" encoding="utf-8"?>
+<p:notes xmlns:a="http://schemas.openxmlformats.org/drawingml/2006/main" xmlns:r="http://schemas.openxmlformats.org/officeDocument/2006/relationships" xmlns:p="http://schemas.openxmlformats.org/presentationml/2006/main">
+  <p:cSld>
+    <p:spTree>
+      <p:nvGrpSpPr>
+        <p:cNvPr id="1" name=""/>
+        <p:cNvGrpSpPr/>
+        <p:nvPr/>
+      </p:nvGrpSpPr>
+      <p:grpSpPr>
+        <a:xfrm>
+          <a:off x="0" y="0"/>
+          <a:ext cx="0" cy="0"/>
+          <a:chOff x="0" y="0"/>
+          <a:chExt cx="0" cy="0"/>
+        </a:xfrm>
+      </p:grpSpPr>
+      <p:sp>
+        <p:nvSpPr>
+          <p:cNvPr id="2" name="Notes Placeholder 18"/>
+          <p:cNvSpPr>
+            <a:spLocks noGrp="1"/>
+          </p:cNvSpPr>
+          <p:nvPr>
+            <p:ph type="body" idx="1"/>
+          </p:nvPr>
+        </p:nvSpPr>
+        <p:spPr/>
+        <p:txBody>
+          <a:bodyPr/>
+          <a:lstStyle/>
+          <a:p>
+            <a:r>
+              <a:rPr lang="en-US" dirty="0"/>
+              <a:t>The symmetry is the thing to leave them with: a composition hands injectivity down to its first link and surjectivity up to its last . Both halves fail in the other direction, and the counterexample above is the smallest witness for one of them. If a group proposed "assume $g$ injective" as the repair in part 3, point out that this assumes the conclusion.</a:t>
+            </a:r>
+          </a:p>
+        </p:txBody>
+      </p:sp>
+    </p:spTree>
+  </p:cSld>
+  <p:clrMapOvr>
+    <a:masterClrMapping/>
+  </p:clrMapOvr>
+</p:notes>
+</file>
+
 <file path=ppt/notesSlides/notesSlide19.xml><?xml version="1.0" encoding="utf-8"?>
 <p:notes xmlns:a="http://schemas.openxmlformats.org/drawingml/2006/main" xmlns:r="http://schemas.openxmlformats.org/officeDocument/2006/relationships" xmlns:p="http://schemas.openxmlformats.org/presentationml/2006/main">
   <p:cSld>
@@ -594,7 +593,7 @@
           <a:p>
             <a:r>
               <a:rPr lang="en-US" dirty="0"/>
-              <a:t>The symmetry is the thing to leave them with: a composition hands injectivity down to its first link and surjectivity up to its last . Both halves fail in the other direction, and the counterexample above is the smallest witness for one of them. If a group proposed "assume $g$ injective" as the repair in part 3, point out that this assumes the conclusion.</a:t>
+              <a:t>Draw the circle before you say a word, and walk a finger round it. The single idea: $\theta$ is a length , so $\sin$ and $\cos$ are functions $\mathbb{R} \to \mathbb{R}$ like any other — not triangle ratios that stop at $90^\circ$. Derive $\sin^2 + \cos^2 = 1$ by pointing at the circle; most of them memorised it and have never been shown that it is one substitution.</a:t>
             </a:r>
           </a:p>
         </p:txBody>
@@ -688,53 +687,6 @@
           <a:p>
             <a:r>
               <a:rPr lang="en-US" dirty="0"/>
-              <a:t>Draw the circle before you say a word, and walk a finger round it. The single idea: $\theta$ is a length , so $\sin$ and $\cos$ are functions $\mathbb{R} \to \mathbb{R}$ like any other — not triangle ratios that stop at $90^\circ$. Derive $\sin^2 + \cos^2 = 1$ by pointing at the circle; most of them memorised it and have never been shown that it is one substitution.</a:t>
-            </a:r>
-          </a:p>
-        </p:txBody>
-      </p:sp>
-    </p:spTree>
-  </p:cSld>
-  <p:clrMapOvr>
-    <a:masterClrMapping/>
-  </p:clrMapOvr>
-</p:notes>
-</file>
-
-<file path=ppt/notesSlides/notesSlide21.xml><?xml version="1.0" encoding="utf-8"?>
-<p:notes xmlns:a="http://schemas.openxmlformats.org/drawingml/2006/main" xmlns:r="http://schemas.openxmlformats.org/officeDocument/2006/relationships" xmlns:p="http://schemas.openxmlformats.org/presentationml/2006/main">
-  <p:cSld>
-    <p:spTree>
-      <p:nvGrpSpPr>
-        <p:cNvPr id="1" name=""/>
-        <p:cNvGrpSpPr/>
-        <p:nvPr/>
-      </p:nvGrpSpPr>
-      <p:grpSpPr>
-        <a:xfrm>
-          <a:off x="0" y="0"/>
-          <a:ext cx="0" cy="0"/>
-          <a:chOff x="0" y="0"/>
-          <a:chExt cx="0" cy="0"/>
-        </a:xfrm>
-      </p:grpSpPr>
-      <p:sp>
-        <p:nvSpPr>
-          <p:cNvPr id="2" name="Notes Placeholder 21"/>
-          <p:cNvSpPr>
-            <a:spLocks noGrp="1"/>
-          </p:cNvSpPr>
-          <p:nvPr>
-            <p:ph type="body" idx="1"/>
-          </p:nvPr>
-        </p:nvSpPr>
-        <p:spPr/>
-        <p:txBody>
-          <a:bodyPr/>
-          <a:lstStyle/>
-          <a:p>
-            <a:r>
-              <a:rPr lang="en-US" dirty="0"/>
               <a:t>This is the slide that ties the two halves of the day together, so do not rush it. A periodic function repeats, so it is never injective on all of $\mathbb{R}$, so it has no inverse there — full stop. Every calculator's $\sin^{-1}$ button is silently working on a restricted domain, which is why it returns $-\tfrac{\pi}{2}$ to $\tfrac{\pi}{2}$ and nothing else. Ask why we chose that interval and not, say, $[\tfrac{\pi}{2}, \tfrac{3\pi}{2}]$: we could have, it is a convention, and the theorem does not care.</a:t>
             </a:r>
           </a:p>
@@ -748,7 +700,7 @@
 </p:notes>
 </file>
 
-<file path=ppt/notesSlides/notesSlide22.xml><?xml version="1.0" encoding="utf-8"?>
+<file path=ppt/notesSlides/notesSlide21.xml><?xml version="1.0" encoding="utf-8"?>
 <p:notes xmlns:a="http://schemas.openxmlformats.org/drawingml/2006/main" xmlns:r="http://schemas.openxmlformats.org/officeDocument/2006/relationships" xmlns:p="http://schemas.openxmlformats.org/presentationml/2006/main">
   <p:cSld>
     <p:spTree>
@@ -767,7 +719,7 @@
       </p:grpSpPr>
       <p:sp>
         <p:nvSpPr>
-          <p:cNvPr id="2" name="Notes Placeholder 22"/>
+          <p:cNvPr id="2" name="Notes Placeholder 21"/>
           <p:cNvSpPr>
             <a:spLocks noGrp="1"/>
           </p:cNvSpPr>
@@ -795,7 +747,7 @@
 </p:notes>
 </file>
 
-<file path=ppt/notesSlides/notesSlide23.xml><?xml version="1.0" encoding="utf-8"?>
+<file path=ppt/notesSlides/notesSlide22.xml><?xml version="1.0" encoding="utf-8"?>
 <p:notes xmlns:a="http://schemas.openxmlformats.org/drawingml/2006/main" xmlns:r="http://schemas.openxmlformats.org/officeDocument/2006/relationships" xmlns:p="http://schemas.openxmlformats.org/presentationml/2006/main">
   <p:cSld>
     <p:spTree>
@@ -814,7 +766,7 @@
       </p:grpSpPr>
       <p:sp>
         <p:nvSpPr>
-          <p:cNvPr id="2" name="Notes Placeholder 23"/>
+          <p:cNvPr id="2" name="Notes Placeholder 22"/>
           <p:cNvSpPr>
             <a:spLocks noGrp="1"/>
           </p:cNvSpPr>
@@ -842,7 +794,7 @@
 </p:notes>
 </file>
 
-<file path=ppt/notesSlides/notesSlide24.xml><?xml version="1.0" encoding="utf-8"?>
+<file path=ppt/notesSlides/notesSlide23.xml><?xml version="1.0" encoding="utf-8"?>
 <p:notes xmlns:a="http://schemas.openxmlformats.org/drawingml/2006/main" xmlns:r="http://schemas.openxmlformats.org/officeDocument/2006/relationships" xmlns:p="http://schemas.openxmlformats.org/presentationml/2006/main">
   <p:cSld>
     <p:spTree>
@@ -861,7 +813,7 @@
       </p:grpSpPr>
       <p:sp>
         <p:nvSpPr>
-          <p:cNvPr id="2" name="Notes Placeholder 24"/>
+          <p:cNvPr id="2" name="Notes Placeholder 23"/>
           <p:cNvSpPr>
             <a:spLocks noGrp="1"/>
           </p:cNvSpPr>
@@ -889,7 +841,7 @@
 </p:notes>
 </file>
 
-<file path=ppt/notesSlides/notesSlide25.xml><?xml version="1.0" encoding="utf-8"?>
+<file path=ppt/notesSlides/notesSlide24.xml><?xml version="1.0" encoding="utf-8"?>
 <p:notes xmlns:a="http://schemas.openxmlformats.org/drawingml/2006/main" xmlns:r="http://schemas.openxmlformats.org/officeDocument/2006/relationships" xmlns:p="http://schemas.openxmlformats.org/presentationml/2006/main">
   <p:cSld>
     <p:spTree>
@@ -908,7 +860,7 @@
       </p:grpSpPr>
       <p:sp>
         <p:nvSpPr>
-          <p:cNvPr id="2" name="Notes Placeholder 25"/>
+          <p:cNvPr id="2" name="Notes Placeholder 24"/>
           <p:cNvSpPr>
             <a:spLocks noGrp="1"/>
           </p:cNvSpPr>
@@ -936,7 +888,7 @@
 </p:notes>
 </file>
 
-<file path=ppt/notesSlides/notesSlide26.xml><?xml version="1.0" encoding="utf-8"?>
+<file path=ppt/notesSlides/notesSlide25.xml><?xml version="1.0" encoding="utf-8"?>
 <p:notes xmlns:a="http://schemas.openxmlformats.org/drawingml/2006/main" xmlns:r="http://schemas.openxmlformats.org/officeDocument/2006/relationships" xmlns:p="http://schemas.openxmlformats.org/presentationml/2006/main">
   <p:cSld>
     <p:spTree>
@@ -955,7 +907,7 @@
       </p:grpSpPr>
       <p:sp>
         <p:nvSpPr>
-          <p:cNvPr id="2" name="Notes Placeholder 26"/>
+          <p:cNvPr id="2" name="Notes Placeholder 25"/>
           <p:cNvSpPr>
             <a:spLocks noGrp="1"/>
           </p:cNvSpPr>
@@ -1017,7 +969,7 @@
           <a:p>
             <a:r>
               <a:rPr lang="en-US" dirty="0"/>
-              <a:t>Ask the box before you answer it, and let them commit out loud. Most of the room says yes. A more precise answer is "not completely specified — you have given me a rule but not its domain and codomain", and by the end of the first hour they will see that the same rule $x^2$ is four different functions depending on the sets you attach. Also flag the sets link: a function has a graph that is a special subset of $A \times B$, so yesterday was not a detour.</a:t>
+              <a:t>This slide replaces the recap and the objectives, so it has to do both jobs in ten minutes. Do not read the tables out. Put them up, give the room ninety seconds to find the one line they cannot explain, and take three of those. The two lines worth defending out loud are $\in$ against $\subseteq$ — object to set versus set to set — and double inclusion, because that is the proof method today's injectivity and surjectivity arguments are built on. Then ask the question in the box and let them commit out loud. Most of the room says yes. A more precise answer is "not completely specified — you have given me a rule but not its domain and codomain", and by the end of the first hour they will see that the same rule $x^2$ is four different functions depending on the sets you attach. Today's assessed skill is proving injectivity, surjectivity and bijectivity: a verdict without a proof scores nothing.</a:t>
             </a:r>
           </a:p>
         </p:txBody>
@@ -1050,53 +1002,6 @@
       <p:sp>
         <p:nvSpPr>
           <p:cNvPr id="2" name="Notes Placeholder 4"/>
-          <p:cNvSpPr>
-            <a:spLocks noGrp="1"/>
-          </p:cNvSpPr>
-          <p:nvPr>
-            <p:ph type="body" idx="1"/>
-          </p:nvPr>
-        </p:nvSpPr>
-        <p:spPr/>
-        <p:txBody>
-          <a:bodyPr/>
-          <a:lstStyle/>
-          <a:p>
-            <a:r>
-              <a:rPr lang="en-US" dirty="0"/>
-              <a:t>Read them out. Objective 2 is the one that matters — the problem set is eight classification items and each needs a proof or a counterexample, not a verdict. Objectives 3 and 4 join up at the end of the day: $\arcsin$ exists only because we restrict $\sin$ until it is a bijection.</a:t>
-            </a:r>
-          </a:p>
-        </p:txBody>
-      </p:sp>
-    </p:spTree>
-  </p:cSld>
-  <p:clrMapOvr>
-    <a:masterClrMapping/>
-  </p:clrMapOvr>
-</p:notes>
-</file>
-
-<file path=ppt/notesSlides/notesSlide5.xml><?xml version="1.0" encoding="utf-8"?>
-<p:notes xmlns:a="http://schemas.openxmlformats.org/drawingml/2006/main" xmlns:r="http://schemas.openxmlformats.org/officeDocument/2006/relationships" xmlns:p="http://schemas.openxmlformats.org/presentationml/2006/main">
-  <p:cSld>
-    <p:spTree>
-      <p:nvGrpSpPr>
-        <p:cNvPr id="1" name=""/>
-        <p:cNvGrpSpPr/>
-        <p:nvPr/>
-      </p:nvGrpSpPr>
-      <p:grpSpPr>
-        <a:xfrm>
-          <a:off x="0" y="0"/>
-          <a:ext cx="0" cy="0"/>
-          <a:chOff x="0" y="0"/>
-          <a:chExt cx="0" cy="0"/>
-        </a:xfrm>
-      </p:grpSpPr>
-      <p:sp>
-        <p:nvSpPr>
-          <p:cNvPr id="2" name="Notes Placeholder 5"/>
           <p:cNvSpPr>
             <a:spLocks noGrp="1"/>
           </p:cNvSpPr>
@@ -1124,7 +1029,7 @@
 </p:notes>
 </file>
 
-<file path=ppt/notesSlides/notesSlide6.xml><?xml version="1.0" encoding="utf-8"?>
+<file path=ppt/notesSlides/notesSlide5.xml><?xml version="1.0" encoding="utf-8"?>
 <p:notes xmlns:a="http://schemas.openxmlformats.org/drawingml/2006/main" xmlns:r="http://schemas.openxmlformats.org/officeDocument/2006/relationships" xmlns:p="http://schemas.openxmlformats.org/presentationml/2006/main">
   <p:cSld>
     <p:spTree>
@@ -1143,7 +1048,7 @@
       </p:grpSpPr>
       <p:sp>
         <p:nvSpPr>
-          <p:cNvPr id="2" name="Notes Placeholder 6"/>
+          <p:cNvPr id="2" name="Notes Placeholder 5"/>
           <p:cNvSpPr>
             <a:spLocks noGrp="1"/>
           </p:cNvSpPr>
@@ -1171,7 +1076,7 @@
 </p:notes>
 </file>
 
-<file path=ppt/notesSlides/notesSlide7.xml><?xml version="1.0" encoding="utf-8"?>
+<file path=ppt/notesSlides/notesSlide6.xml><?xml version="1.0" encoding="utf-8"?>
 <p:notes xmlns:a="http://schemas.openxmlformats.org/drawingml/2006/main" xmlns:r="http://schemas.openxmlformats.org/officeDocument/2006/relationships" xmlns:p="http://schemas.openxmlformats.org/presentationml/2006/main">
   <p:cSld>
     <p:spTree>
@@ -1190,7 +1095,7 @@
       </p:grpSpPr>
       <p:sp>
         <p:nvSpPr>
-          <p:cNvPr id="2" name="Notes Placeholder 7"/>
+          <p:cNvPr id="2" name="Notes Placeholder 6"/>
           <p:cNvSpPr>
             <a:spLocks noGrp="1"/>
           </p:cNvSpPr>
@@ -1218,7 +1123,7 @@
 </p:notes>
 </file>
 
-<file path=ppt/notesSlides/notesSlide8.xml><?xml version="1.0" encoding="utf-8"?>
+<file path=ppt/notesSlides/notesSlide7.xml><?xml version="1.0" encoding="utf-8"?>
 <p:notes xmlns:a="http://schemas.openxmlformats.org/drawingml/2006/main" xmlns:r="http://schemas.openxmlformats.org/officeDocument/2006/relationships" xmlns:p="http://schemas.openxmlformats.org/presentationml/2006/main">
   <p:cSld>
     <p:spTree>
@@ -1237,7 +1142,7 @@
       </p:grpSpPr>
       <p:sp>
         <p:nvSpPr>
-          <p:cNvPr id="2" name="Notes Placeholder 8"/>
+          <p:cNvPr id="2" name="Notes Placeholder 7"/>
           <p:cNvSpPr>
             <a:spLocks noGrp="1"/>
           </p:cNvSpPr>
@@ -1265,6 +1170,53 @@
 </p:notes>
 </file>
 
+<file path=ppt/notesSlides/notesSlide8.xml><?xml version="1.0" encoding="utf-8"?>
+<p:notes xmlns:a="http://schemas.openxmlformats.org/drawingml/2006/main" xmlns:r="http://schemas.openxmlformats.org/officeDocument/2006/relationships" xmlns:p="http://schemas.openxmlformats.org/presentationml/2006/main">
+  <p:cSld>
+    <p:spTree>
+      <p:nvGrpSpPr>
+        <p:cNvPr id="1" name=""/>
+        <p:cNvGrpSpPr/>
+        <p:nvPr/>
+      </p:nvGrpSpPr>
+      <p:grpSpPr>
+        <a:xfrm>
+          <a:off x="0" y="0"/>
+          <a:ext cx="0" cy="0"/>
+          <a:chOff x="0" y="0"/>
+          <a:chExt cx="0" cy="0"/>
+        </a:xfrm>
+      </p:grpSpPr>
+      <p:sp>
+        <p:nvSpPr>
+          <p:cNvPr id="2" name="Notes Placeholder 8"/>
+          <p:cNvSpPr>
+            <a:spLocks noGrp="1"/>
+          </p:cNvSpPr>
+          <p:nvPr>
+            <p:ph type="body" idx="1"/>
+          </p:nvPr>
+        </p:nvSpPr>
+        <p:spPr/>
+        <p:txBody>
+          <a:bodyPr/>
+          <a:lstStyle/>
+          <a:p>
+            <a:r>
+              <a:rPr lang="en-US" dirty="0"/>
+              <a:t>Start with the right-hand set, B. Ask students to count the arrows arriving at each yellow dot. For injective, every dot has zero or one arrow; for surjective, every dot has one or more; for bijective, every dot has exactly one. Then point out the separate rule that makes these diagrams functions in the first place: every dot in A has exactly one arrow leaving it. Do not begin with the symbolic definitions; use the final rule box to turn the pictures into the words.</a:t>
+            </a:r>
+          </a:p>
+        </p:txBody>
+      </p:sp>
+    </p:spTree>
+  </p:cSld>
+  <p:clrMapOvr>
+    <a:masterClrMapping/>
+  </p:clrMapOvr>
+</p:notes>
+</file>
+
 <file path=ppt/notesSlides/notesSlide9.xml><?xml version="1.0" encoding="utf-8"?>
 <p:notes xmlns:a="http://schemas.openxmlformats.org/drawingml/2006/main" xmlns:r="http://schemas.openxmlformats.org/officeDocument/2006/relationships" xmlns:p="http://schemas.openxmlformats.org/presentationml/2006/main">
   <p:cSld>
@@ -1299,7 +1251,7 @@
           <a:p>
             <a:r>
               <a:rPr lang="en-US" dirty="0"/>
-              <a:t>Draw the two arrow pictures on the board — dots in $A$, dots in $B$, arrows — before any symbols. Injective = no two arrows meet; surjective = no dot in $B$ is arrow-free. Then read the symbolic definitions back off the pictures. Stress that surjectivity is a statement about the codomain , so shrinking the codomain can create it out of nothing; that is what the second example does.</a:t>
+              <a:t>The asymmetry is the lesson: the positive claims are universal and need an argument, the negative claims are existential and need one number. Students routinely try to disprove surjectivity by saying "it looks like nothing hits $-1$" — that is not the fourth template, and it costs marks all term. Note where the surjectivity witness $\tfrac{y+5}{3}$ came from: solve $f(x) = y$ on scrap paper, then present the answer as a construction. Say that out loud — the discovery and the write-up are different documents.</a:t>
             </a:r>
           </a:p>
         </p:txBody>
@@ -2224,55 +2176,6 @@
       <p:pic>
         <p:nvPicPr>
           <p:cNvPr id="2" name="Slide 25"/>
-          <p:cNvPicPr>
-            <a:picLocks noChangeAspect="1"/>
-          </p:cNvPicPr>
-          <p:nvPr/>
-        </p:nvPicPr>
-        <p:blipFill>
-          <a:blip r:embed="rId2"/>
-          <a:stretch>
-            <a:fillRect/>
-          </a:stretch>
-        </p:blipFill>
-        <p:spPr>
-          <a:xfrm>
-            <a:off x="0" y="0"/>
-            <a:ext cx="12192000" cy="6858000"/>
-          </a:xfrm>
-          <a:prstGeom prst="rect">
-            <a:avLst/>
-          </a:prstGeom>
-        </p:spPr>
-      </p:pic>
-    </p:spTree>
-  </p:cSld>
-  <p:clrMapOvr>
-    <a:masterClrMapping/>
-  </p:clrMapOvr>
-</p:sld>
-</file>
-
-<file path=ppt/slides/slide26.xml><?xml version="1.0" encoding="utf-8"?>
-<p:sld xmlns:a="http://schemas.openxmlformats.org/drawingml/2006/main" xmlns:r="http://schemas.openxmlformats.org/officeDocument/2006/relationships" xmlns:p="http://schemas.openxmlformats.org/presentationml/2006/main">
-  <p:cSld>
-    <p:spTree>
-      <p:nvGrpSpPr>
-        <p:cNvPr id="1" name=""/>
-        <p:cNvGrpSpPr/>
-        <p:nvPr/>
-      </p:nvGrpSpPr>
-      <p:grpSpPr>
-        <a:xfrm>
-          <a:off x="0" y="0"/>
-          <a:ext cx="0" cy="0"/>
-          <a:chOff x="0" y="0"/>
-          <a:chExt cx="0" cy="0"/>
-        </a:xfrm>
-      </p:grpSpPr>
-      <p:pic>
-        <p:nvPicPr>
-          <p:cNvPr id="2" name="Slide 26"/>
           <p:cNvPicPr>
             <a:picLocks noChangeAspect="1"/>
           </p:cNvPicPr>
